--- a/topics/01-superimposition-methods/deck.pptx
+++ b/topics/01-superimposition-methods/deck.pptx
@@ -127,7 +127,7 @@
   <p:extLst>
     <p:ext uri="{521415D9-36F7-43E2-AB2F-B90AF26B5E84}">
       <p14:sectionLst xmlns:p14="http://schemas.microsoft.com/office/powerpoint/2010/main">
-        <p14:section name="Deck" id="{6a85468e-96aa-2a26-447f-8d988adb2793}">
+        <p14:section name="Deck" id="{141ed228-c69a-f84a-fa26-61b34b004827}">
           <p14:sldIdLst>
             <p14:sldId id="256"/>
             <p14:sldId id="257"/>
